--- a/dist/초3/과학/생물/초3_과학_생물_02_동물의한살이_학생용.pptx
+++ b/dist/초3/과학/생물/초3_과학_생물_02_동물의한살이_학생용.pptx
@@ -120,13 +120,13 @@
   <p:extLst>
     <p:ext uri="{521415D9-36F7-43E2-AB2F-B90AF26B5E84}">
       <p14:sectionLst xmlns:p14="http://schemas.microsoft.com/office/powerpoint/2010/main">
-        <p14:section name="도입" id="{34ba311c-a1f2-9c92-3a5b-325b14bf4536}">
+        <p14:section name="도입" id="{cbf53067-38ae-6472-fdeb-441d188e6c45}">
           <p14:sldIdLst>
             <p14:sldId id="256"/>
             <p14:sldId id="257"/>
           </p14:sldIdLst>
         </p14:section>
-        <p14:section name="개념" id="{2b6c3669-4f45-4c6f-afec-223cfce9fd5b}">
+        <p14:section name="개념" id="{1430c502-233e-dc05-9cc3-3c87462bc070}">
           <p14:sldIdLst>
             <p14:sldId id="258"/>
             <p14:sldId id="259"/>
@@ -137,29 +137,29 @@
             <p14:sldId id="265"/>
           </p14:sldIdLst>
         </p14:section>
-        <p14:section name="연습" id="{f6dff70a-a2f6-9843-f9ce-c2edabb962df}">
+        <p14:section name="연습" id="{f413315a-e973-5ee1-09aa-d6ecd3cec6b3}">
           <p14:sldIdLst>
             <p14:sldId id="263"/>
             <p14:sldId id="266"/>
           </p14:sldIdLst>
         </p14:section>
-        <p14:section name="개념" id="{fb223c67-65cf-e8b2-f73a-b772c38b4c26}">
+        <p14:section name="개념" id="{006061aa-6949-d2e8-dbf2-8a46c02f3990}">
           <p14:sldIdLst/>
         </p14:section>
-        <p14:section name="연습" id="{861c3cc4-3802-27eb-304f-fe221ef6234d}">
+        <p14:section name="연습" id="{7dcffb49-4f39-63bd-cb14-c43d5c75ff7a}">
           <p14:sldIdLst/>
         </p14:section>
-        <p14:section name="확인" id="{59f22f37-ad37-72f9-4ed0-c77af50398a4}">
+        <p14:section name="확인" id="{46a6eac8-71f8-176e-0e1d-8eee22fd8bcf}">
           <p14:sldIdLst>
             <p14:sldId id="267"/>
           </p14:sldIdLst>
         </p14:section>
-        <p14:section name="정리" id="{b2f5de74-2574-6a8a-92a5-f4eeb82c6ef9}">
+        <p14:section name="정리" id="{a436ad00-d56e-d20f-f44b-01ecc83084ef}">
           <p14:sldIdLst>
             <p14:sldId id="268"/>
           </p14:sldIdLst>
         </p14:section>
-        <p14:section name="보충" id="{0c724bca-c527-d835-e589-6e069ee34feb}">
+        <p14:section name="보충" id="{d4c6b8ff-9fcd-6eb8-bbf1-c73130f6f8ad}">
           <p14:sldIdLst>
             <p14:sldId id="269"/>
           </p14:sldIdLst>
